--- a/2.VM_Cloud/Virtual Machines.pptx
+++ b/2.VM_Cloud/Virtual Machines.pptx
@@ -267,7 +267,7 @@
           <a:p>
             <a:fld id="{7189E0C7-3E3B-4416-85D0-AB73CC349D69}" type="datetimeFigureOut">
               <a:rPr lang="en-US" smtClean="0"/>
-              <a:t>8/12/2021</a:t>
+              <a:t>8/12/2024</a:t>
             </a:fld>
             <a:endParaRPr lang="en-US"/>
           </a:p>
@@ -465,7 +465,7 @@
           <a:p>
             <a:fld id="{7189E0C7-3E3B-4416-85D0-AB73CC349D69}" type="datetimeFigureOut">
               <a:rPr lang="en-US" smtClean="0"/>
-              <a:t>8/12/2021</a:t>
+              <a:t>8/12/2024</a:t>
             </a:fld>
             <a:endParaRPr lang="en-US"/>
           </a:p>
@@ -673,7 +673,7 @@
           <a:p>
             <a:fld id="{7189E0C7-3E3B-4416-85D0-AB73CC349D69}" type="datetimeFigureOut">
               <a:rPr lang="en-US" smtClean="0"/>
-              <a:t>8/12/2021</a:t>
+              <a:t>8/12/2024</a:t>
             </a:fld>
             <a:endParaRPr lang="en-US"/>
           </a:p>
@@ -871,7 +871,7 @@
           <a:p>
             <a:fld id="{7189E0C7-3E3B-4416-85D0-AB73CC349D69}" type="datetimeFigureOut">
               <a:rPr lang="en-US" smtClean="0"/>
-              <a:t>8/12/2021</a:t>
+              <a:t>8/12/2024</a:t>
             </a:fld>
             <a:endParaRPr lang="en-US"/>
           </a:p>
@@ -1146,7 +1146,7 @@
           <a:p>
             <a:fld id="{7189E0C7-3E3B-4416-85D0-AB73CC349D69}" type="datetimeFigureOut">
               <a:rPr lang="en-US" smtClean="0"/>
-              <a:t>8/12/2021</a:t>
+              <a:t>8/12/2024</a:t>
             </a:fld>
             <a:endParaRPr lang="en-US"/>
           </a:p>
@@ -1411,7 +1411,7 @@
           <a:p>
             <a:fld id="{7189E0C7-3E3B-4416-85D0-AB73CC349D69}" type="datetimeFigureOut">
               <a:rPr lang="en-US" smtClean="0"/>
-              <a:t>8/12/2021</a:t>
+              <a:t>8/12/2024</a:t>
             </a:fld>
             <a:endParaRPr lang="en-US"/>
           </a:p>
@@ -1823,7 +1823,7 @@
           <a:p>
             <a:fld id="{7189E0C7-3E3B-4416-85D0-AB73CC349D69}" type="datetimeFigureOut">
               <a:rPr lang="en-US" smtClean="0"/>
-              <a:t>8/12/2021</a:t>
+              <a:t>8/12/2024</a:t>
             </a:fld>
             <a:endParaRPr lang="en-US"/>
           </a:p>
@@ -1964,7 +1964,7 @@
           <a:p>
             <a:fld id="{7189E0C7-3E3B-4416-85D0-AB73CC349D69}" type="datetimeFigureOut">
               <a:rPr lang="en-US" smtClean="0"/>
-              <a:t>8/12/2021</a:t>
+              <a:t>8/12/2024</a:t>
             </a:fld>
             <a:endParaRPr lang="en-US"/>
           </a:p>
@@ -2077,7 +2077,7 @@
           <a:p>
             <a:fld id="{7189E0C7-3E3B-4416-85D0-AB73CC349D69}" type="datetimeFigureOut">
               <a:rPr lang="en-US" smtClean="0"/>
-              <a:t>8/12/2021</a:t>
+              <a:t>8/12/2024</a:t>
             </a:fld>
             <a:endParaRPr lang="en-US"/>
           </a:p>
@@ -2388,7 +2388,7 @@
           <a:p>
             <a:fld id="{7189E0C7-3E3B-4416-85D0-AB73CC349D69}" type="datetimeFigureOut">
               <a:rPr lang="en-US" smtClean="0"/>
-              <a:t>8/12/2021</a:t>
+              <a:t>8/12/2024</a:t>
             </a:fld>
             <a:endParaRPr lang="en-US"/>
           </a:p>
@@ -2676,7 +2676,7 @@
           <a:p>
             <a:fld id="{7189E0C7-3E3B-4416-85D0-AB73CC349D69}" type="datetimeFigureOut">
               <a:rPr lang="en-US" smtClean="0"/>
-              <a:t>8/12/2021</a:t>
+              <a:t>8/12/2024</a:t>
             </a:fld>
             <a:endParaRPr lang="en-US"/>
           </a:p>
@@ -2917,7 +2917,7 @@
           <a:p>
             <a:fld id="{7189E0C7-3E3B-4416-85D0-AB73CC349D69}" type="datetimeFigureOut">
               <a:rPr lang="en-US" smtClean="0"/>
-              <a:t>8/12/2021</a:t>
+              <a:t>8/12/2024</a:t>
             </a:fld>
             <a:endParaRPr lang="en-US"/>
           </a:p>
@@ -3396,9 +3396,10 @@
           </a:p>
           <a:p>
             <a:r>
-              <a:rPr lang="en-US" dirty="0"/>
-              <a:t>Fall 2021</a:t>
-            </a:r>
+              <a:rPr lang="en-US"/>
+              <a:t>Fall 2024</a:t>
+            </a:r>
+            <a:endParaRPr lang="en-US" dirty="0"/>
           </a:p>
         </p:txBody>
       </p:sp>
@@ -4755,7 +4756,7 @@
         <p:spPr>
           <a:xfrm>
             <a:off x="6234542" y="1868859"/>
-            <a:ext cx="1981198" cy="646331"/>
+            <a:ext cx="1981198" cy="369332"/>
           </a:xfrm>
           <a:prstGeom prst="rect">
             <a:avLst/>
@@ -4770,7 +4771,7 @@
           <a:p>
             <a:r>
               <a:rPr lang="en-US" dirty="0"/>
-              <a:t>Directory Controller</a:t>
+              <a:t>Domain Controller</a:t>
             </a:r>
           </a:p>
         </p:txBody>
